--- a/skills/uav-paper-report/assets/examples/uav-primer-regression-report.pptx
+++ b/skills/uav-paper-report/assets/examples/uav-primer-regression-report.pptx
@@ -5528,7 +5528,7 @@
                           <a:ea typeface="Times New Roman"/>
                           <a:cs typeface="Times New Roman"/>
                         </a:rPr>
-                        <a:t>v_max=2.0 m/s, a_max=10.0 m/s², j_max=30.0 m/s³</a:t>
+                        <a:t>vₘₐₓ=2.0 m/s, aₘₐₓ=10.0 m/s², jₘₐₓ=30.0 m/s³</a:t>
                       </a:r>
                     </a:p>
                   </a:txBody>
@@ -18460,7 +18460,7 @@
                 <a:ea typeface="Times New Roman"/>
                 <a:cs typeface="Times New Roman"/>
               </a:rPr>
-              <a:t>(1)    </a:t>
+              <a:t>(1)    J𝒇 = - α𝒇 · ∑ᵢ ∫₀ᵀ [inFOV(oᵢ, p(t), ψ(t))]³ dt</a:t>
             </a:r>
             <a:r>
               <a:rPr sz="2200" b="0">
@@ -18471,7 +18471,7 @@
                 <a:ea typeface="Times New Roman"/>
                 <a:cs typeface="Times New Roman"/>
               </a:rPr>
-              <a:t>J_FOV = - α_FOV · ∑ᵢ ∫₀ᵀ [inFOV(oᵢ, p(t), ψ(t))]³ dt</a:t>
+              <a:t/>
             </a:r>
           </a:p>
         </p:txBody>
@@ -18612,7 +18612,7 @@
                 <a:ea typeface="Times New Roman"/>
                 <a:cs typeface="Times New Roman"/>
               </a:rPr>
-              <a:t>• α_FOV控制“保持观测”相对于轨迹代价的权重；负号表示优化时会倾向于增大视场内观测质量。</a:t>
+              <a:t>• α𝒇控制“保持观测”相对于轨迹代价的权重；负号表示优化时会倾向于增大视场内观测质量。</a:t>
             </a:r>
           </a:p>
           <a:p>
@@ -19874,7 +19874,7 @@
                 <a:ea typeface="Times New Roman"/>
                 <a:cs typeface="Times New Roman"/>
               </a:rPr>
-              <a:t>(2)    </a:t>
+              <a:t>(2)    Lₜ = Lₚ + α Lᵧ</a:t>
             </a:r>
             <a:r>
               <a:rPr sz="2200" b="0">
@@ -19885,7 +19885,7 @@
                 <a:ea typeface="Times New Roman"/>
                 <a:cs typeface="Times New Roman"/>
               </a:rPr>
-              <a:t>L_total = L_pos + α L_yaw</a:t>
+              <a:t/>
             </a:r>
           </a:p>
         </p:txBody>
@@ -19990,7 +19990,7 @@
                 <a:ea typeface="Times New Roman"/>
                 <a:cs typeface="Times New Roman"/>
               </a:rPr>
-              <a:t>    </a:t>
+              <a:t>    Lₚ：位置误差；Lᵧ：偏航误差</a:t>
             </a:r>
             <a:r>
               <a:rPr sz="1860" b="0">
@@ -20001,7 +20001,7 @@
                 <a:ea typeface="Times New Roman"/>
                 <a:cs typeface="Times New Roman"/>
               </a:rPr>
-              <a:t>L_pos：位置误差；L_yaw：偏航误差</a:t>
+              <a:t/>
             </a:r>
           </a:p>
         </p:txBody>

--- a/skills/uav-paper-report/assets/examples/uav-primer-regression-report.pptx
+++ b/skills/uav-paper-report/assets/examples/uav-primer-regression-report.pptx
@@ -5402,7 +5402,7 @@
                         </a:spcAft>
                       </a:pPr>
                       <a:r>
-                        <a:rPr sz="1360" b="1">
+                        <a:rPr sz="1240" b="1">
                           <a:solidFill>
                             <a:srgbClr val="000000"/>
                           </a:solidFill>
@@ -5431,7 +5431,7 @@
                         </a:spcAft>
                       </a:pPr>
                       <a:r>
-                        <a:rPr sz="1360" b="1">
+                        <a:rPr sz="1240" b="1">
                           <a:solidFill>
                             <a:srgbClr val="000000"/>
                           </a:solidFill>
@@ -5460,7 +5460,7 @@
                         </a:spcAft>
                       </a:pPr>
                       <a:r>
-                        <a:rPr sz="1360" b="1">
+                        <a:rPr sz="1240" b="1">
                           <a:solidFill>
                             <a:srgbClr val="000000"/>
                           </a:solidFill>
@@ -5491,7 +5491,7 @@
                         </a:spcAft>
                       </a:pPr>
                       <a:r>
-                        <a:rPr sz="1360" b="1">
+                        <a:rPr sz="1240" b="1">
                           <a:solidFill>
                             <a:srgbClr val="000000"/>
                           </a:solidFill>
@@ -5520,7 +5520,7 @@
                         </a:spcAft>
                       </a:pPr>
                       <a:r>
-                        <a:rPr sz="1360" b="1">
+                        <a:rPr sz="1240" b="1">
                           <a:solidFill>
                             <a:srgbClr val="FF0000"/>
                           </a:solidFill>
@@ -5549,7 +5549,7 @@
                         </a:spcAft>
                       </a:pPr>
                       <a:r>
-                        <a:rPr sz="1360" b="0">
+                        <a:rPr sz="1240" b="0">
                           <a:solidFill>
                             <a:srgbClr val="000000"/>
                           </a:solidFill>
@@ -5580,7 +5580,7 @@
                         </a:spcAft>
                       </a:pPr>
                       <a:r>
-                        <a:rPr sz="1360" b="1">
+                        <a:rPr sz="1240" b="1">
                           <a:solidFill>
                             <a:srgbClr val="000000"/>
                           </a:solidFill>
@@ -5609,7 +5609,7 @@
                         </a:spcAft>
                       </a:pPr>
                       <a:r>
-                        <a:rPr sz="1360" b="1">
+                        <a:rPr sz="1240" b="1">
                           <a:solidFill>
                             <a:srgbClr val="000000"/>
                           </a:solidFill>
@@ -5638,7 +5638,7 @@
                         </a:spcAft>
                       </a:pPr>
                       <a:r>
-                        <a:rPr sz="1360" b="0">
+                        <a:rPr sz="1240" b="0">
                           <a:solidFill>
                             <a:srgbClr val="000000"/>
                           </a:solidFill>
@@ -5669,7 +5669,7 @@
                         </a:spcAft>
                       </a:pPr>
                       <a:r>
-                        <a:rPr sz="1360" b="1">
+                        <a:rPr sz="1240" b="1">
                           <a:solidFill>
                             <a:srgbClr val="000000"/>
                           </a:solidFill>
@@ -5698,7 +5698,7 @@
                         </a:spcAft>
                       </a:pPr>
                       <a:r>
-                        <a:rPr sz="1360" b="1">
+                        <a:rPr sz="1240" b="1">
                           <a:solidFill>
                             <a:srgbClr val="000000"/>
                           </a:solidFill>
@@ -5727,7 +5727,7 @@
                         </a:spcAft>
                       </a:pPr>
                       <a:r>
-                        <a:rPr sz="1360" b="0">
+                        <a:rPr sz="1240" b="0">
                           <a:solidFill>
                             <a:srgbClr val="000000"/>
                           </a:solidFill>
@@ -6256,7 +6256,7 @@
                         </a:spcAft>
                       </a:pPr>
                       <a:r>
-                        <a:rPr sz="1400" b="1">
+                        <a:rPr sz="1240" b="1">
                           <a:solidFill>
                             <a:srgbClr val="000000"/>
                           </a:solidFill>
@@ -6285,7 +6285,7 @@
                         </a:spcAft>
                       </a:pPr>
                       <a:r>
-                        <a:rPr sz="1400" b="1">
+                        <a:rPr sz="1240" b="1">
                           <a:solidFill>
                             <a:srgbClr val="000000"/>
                           </a:solidFill>
@@ -6314,7 +6314,7 @@
                         </a:spcAft>
                       </a:pPr>
                       <a:r>
-                        <a:rPr sz="1400" b="1">
+                        <a:rPr sz="1240" b="1">
                           <a:solidFill>
                             <a:srgbClr val="000000"/>
                           </a:solidFill>
@@ -6343,7 +6343,7 @@
                         </a:spcAft>
                       </a:pPr>
                       <a:r>
-                        <a:rPr sz="1400" b="1">
+                        <a:rPr sz="1240" b="1">
                           <a:solidFill>
                             <a:srgbClr val="000000"/>
                           </a:solidFill>
@@ -6372,7 +6372,7 @@
                         </a:spcAft>
                       </a:pPr>
                       <a:r>
-                        <a:rPr sz="1400" b="1">
+                        <a:rPr sz="1240" b="1">
                           <a:solidFill>
                             <a:srgbClr val="000000"/>
                           </a:solidFill>
@@ -6403,7 +6403,7 @@
                         </a:spcAft>
                       </a:pPr>
                       <a:r>
-                        <a:rPr sz="1400" b="1">
+                        <a:rPr sz="1240" b="1">
                           <a:solidFill>
                             <a:srgbClr val="000000"/>
                           </a:solidFill>
@@ -6432,7 +6432,7 @@
                         </a:spcAft>
                       </a:pPr>
                       <a:r>
-                        <a:rPr sz="1400" b="1">
+                        <a:rPr sz="1240" b="1">
                           <a:solidFill>
                             <a:srgbClr val="000000"/>
                           </a:solidFill>
@@ -6461,7 +6461,7 @@
                         </a:spcAft>
                       </a:pPr>
                       <a:r>
-                        <a:rPr sz="1400" b="0">
+                        <a:rPr sz="1240" b="0">
                           <a:solidFill>
                             <a:srgbClr val="FF0000"/>
                           </a:solidFill>
@@ -6490,7 +6490,7 @@
                         </a:spcAft>
                       </a:pPr>
                       <a:r>
-                        <a:rPr sz="1400" b="0">
+                        <a:rPr sz="1240" b="0">
                           <a:solidFill>
                             <a:srgbClr val="009641"/>
                           </a:solidFill>
@@ -6519,7 +6519,7 @@
                         </a:spcAft>
                       </a:pPr>
                       <a:r>
-                        <a:rPr sz="1400" b="0">
+                        <a:rPr sz="1240" b="0">
                           <a:solidFill>
                             <a:srgbClr val="009641"/>
                           </a:solidFill>
@@ -6550,7 +6550,7 @@
                         </a:spcAft>
                       </a:pPr>
                       <a:r>
-                        <a:rPr sz="1400" b="1">
+                        <a:rPr sz="1240" b="1">
                           <a:solidFill>
                             <a:srgbClr val="009641"/>
                           </a:solidFill>
@@ -6579,7 +6579,7 @@
                         </a:spcAft>
                       </a:pPr>
                       <a:r>
-                        <a:rPr sz="1400" b="1">
+                        <a:rPr sz="1240" b="1">
                           <a:solidFill>
                             <a:srgbClr val="000000"/>
                           </a:solidFill>
@@ -6608,7 +6608,7 @@
                         </a:spcAft>
                       </a:pPr>
                       <a:r>
-                        <a:rPr sz="1400" b="0">
+                        <a:rPr sz="1240" b="0">
                           <a:solidFill>
                             <a:srgbClr val="009641"/>
                           </a:solidFill>
@@ -6637,7 +6637,7 @@
                         </a:spcAft>
                       </a:pPr>
                       <a:r>
-                        <a:rPr sz="1400" b="0">
+                        <a:rPr sz="1240" b="0">
                           <a:solidFill>
                             <a:srgbClr val="009641"/>
                           </a:solidFill>
@@ -6666,7 +6666,7 @@
                         </a:spcAft>
                       </a:pPr>
                       <a:r>
-                        <a:rPr sz="1400" b="0">
+                        <a:rPr sz="1240" b="0">
                           <a:solidFill>
                             <a:srgbClr val="009641"/>
                           </a:solidFill>
@@ -7503,7 +7503,7 @@
                         </a:spcAft>
                       </a:pPr>
                       <a:r>
-                        <a:rPr sz="1160" b="1">
+                        <a:rPr sz="1240" b="1">
                           <a:solidFill>
                             <a:srgbClr val="000000"/>
                           </a:solidFill>
@@ -7532,7 +7532,7 @@
                         </a:spcAft>
                       </a:pPr>
                       <a:r>
-                        <a:rPr sz="1160" b="1">
+                        <a:rPr sz="1240" b="1">
                           <a:solidFill>
                             <a:srgbClr val="000000"/>
                           </a:solidFill>
@@ -7561,7 +7561,7 @@
                         </a:spcAft>
                       </a:pPr>
                       <a:r>
-                        <a:rPr sz="1160" b="1">
+                        <a:rPr sz="1240" b="1">
                           <a:solidFill>
                             <a:srgbClr val="000000"/>
                           </a:solidFill>
@@ -7590,7 +7590,7 @@
                         </a:spcAft>
                       </a:pPr>
                       <a:r>
-                        <a:rPr sz="1160" b="1">
+                        <a:rPr sz="1240" b="1">
                           <a:solidFill>
                             <a:srgbClr val="000000"/>
                           </a:solidFill>
@@ -7619,7 +7619,7 @@
                         </a:spcAft>
                       </a:pPr>
                       <a:r>
-                        <a:rPr sz="1160" b="1">
+                        <a:rPr sz="1240" b="1">
                           <a:solidFill>
                             <a:srgbClr val="000000"/>
                           </a:solidFill>
@@ -7648,7 +7648,7 @@
                         </a:spcAft>
                       </a:pPr>
                       <a:r>
-                        <a:rPr sz="1160" b="1">
+                        <a:rPr sz="1240" b="1">
                           <a:solidFill>
                             <a:srgbClr val="000000"/>
                           </a:solidFill>
@@ -7677,7 +7677,7 @@
                         </a:spcAft>
                       </a:pPr>
                       <a:r>
-                        <a:rPr sz="1160" b="1">
+                        <a:rPr sz="1240" b="1">
                           <a:solidFill>
                             <a:srgbClr val="000000"/>
                           </a:solidFill>
@@ -7706,7 +7706,7 @@
                         </a:spcAft>
                       </a:pPr>
                       <a:r>
-                        <a:rPr sz="1160" b="1">
+                        <a:rPr sz="1240" b="1">
                           <a:solidFill>
                             <a:srgbClr val="000000"/>
                           </a:solidFill>
@@ -7735,7 +7735,7 @@
                         </a:spcAft>
                       </a:pPr>
                       <a:r>
-                        <a:rPr sz="1160" b="1">
+                        <a:rPr sz="1240" b="1">
                           <a:solidFill>
                             <a:srgbClr val="000000"/>
                           </a:solidFill>
@@ -7766,7 +7766,7 @@
                         </a:spcAft>
                       </a:pPr>
                       <a:r>
-                        <a:rPr sz="1160" b="1">
+                        <a:rPr sz="1240" b="1">
                           <a:solidFill>
                             <a:srgbClr val="000000"/>
                           </a:solidFill>
@@ -7795,7 +7795,7 @@
                         </a:spcAft>
                       </a:pPr>
                       <a:r>
-                        <a:rPr sz="1160" b="1">
+                        <a:rPr sz="1240" b="1">
                           <a:solidFill>
                             <a:srgbClr val="000000"/>
                           </a:solidFill>
@@ -7824,7 +7824,7 @@
                         </a:spcAft>
                       </a:pPr>
                       <a:r>
-                        <a:rPr sz="1160" b="0">
+                        <a:rPr sz="1240" b="0">
                           <a:solidFill>
                             <a:srgbClr val="000000"/>
                           </a:solidFill>
@@ -7853,7 +7853,7 @@
                         </a:spcAft>
                       </a:pPr>
                       <a:r>
-                        <a:rPr sz="1160" b="0">
+                        <a:rPr sz="1240" b="0">
                           <a:solidFill>
                             <a:srgbClr val="FF0000"/>
                           </a:solidFill>
@@ -7882,7 +7882,7 @@
                         </a:spcAft>
                       </a:pPr>
                       <a:r>
-                        <a:rPr sz="1160" b="0">
+                        <a:rPr sz="1240" b="0">
                           <a:solidFill>
                             <a:srgbClr val="009641"/>
                           </a:solidFill>
@@ -7911,7 +7911,7 @@
                         </a:spcAft>
                       </a:pPr>
                       <a:r>
-                        <a:rPr sz="1160" b="0">
+                        <a:rPr sz="1240" b="0">
                           <a:solidFill>
                             <a:srgbClr val="000000"/>
                           </a:solidFill>
@@ -7940,7 +7940,7 @@
                         </a:spcAft>
                       </a:pPr>
                       <a:r>
-                        <a:rPr sz="1160" b="0">
+                        <a:rPr sz="1240" b="0">
                           <a:solidFill>
                             <a:srgbClr val="000000"/>
                           </a:solidFill>
@@ -7969,7 +7969,7 @@
                         </a:spcAft>
                       </a:pPr>
                       <a:r>
-                        <a:rPr sz="1160" b="0">
+                        <a:rPr sz="1240" b="0">
                           <a:solidFill>
                             <a:srgbClr val="000000"/>
                           </a:solidFill>
@@ -7998,7 +7998,7 @@
                         </a:spcAft>
                       </a:pPr>
                       <a:r>
-                        <a:rPr sz="1160" b="0">
+                        <a:rPr sz="1240" b="0">
                           <a:solidFill>
                             <a:srgbClr val="000000"/>
                           </a:solidFill>
@@ -8047,7 +8047,7 @@
                         </a:spcAft>
                       </a:pPr>
                       <a:r>
-                        <a:rPr sz="1160" b="1">
+                        <a:rPr sz="1240" b="1">
                           <a:solidFill>
                             <a:srgbClr val="000000"/>
                           </a:solidFill>
@@ -8076,7 +8076,7 @@
                         </a:spcAft>
                       </a:pPr>
                       <a:r>
-                        <a:rPr sz="1160" b="0">
+                        <a:rPr sz="1240" b="0">
                           <a:solidFill>
                             <a:srgbClr val="000000"/>
                           </a:solidFill>
@@ -8105,7 +8105,7 @@
                         </a:spcAft>
                       </a:pPr>
                       <a:r>
-                        <a:rPr sz="1160" b="0">
+                        <a:rPr sz="1240" b="0">
                           <a:solidFill>
                             <a:srgbClr val="FF0000"/>
                           </a:solidFill>
@@ -8134,7 +8134,7 @@
                         </a:spcAft>
                       </a:pPr>
                       <a:r>
-                        <a:rPr sz="1160" b="0">
+                        <a:rPr sz="1240" b="0">
                           <a:solidFill>
                             <a:srgbClr val="009641"/>
                           </a:solidFill>
@@ -8163,7 +8163,7 @@
                         </a:spcAft>
                       </a:pPr>
                       <a:r>
-                        <a:rPr sz="1160" b="0">
+                        <a:rPr sz="1240" b="0">
                           <a:solidFill>
                             <a:srgbClr val="000000"/>
                           </a:solidFill>
@@ -8192,7 +8192,7 @@
                         </a:spcAft>
                       </a:pPr>
                       <a:r>
-                        <a:rPr sz="1160" b="0">
+                        <a:rPr sz="1240" b="0">
                           <a:solidFill>
                             <a:srgbClr val="000000"/>
                           </a:solidFill>
@@ -8221,7 +8221,7 @@
                         </a:spcAft>
                       </a:pPr>
                       <a:r>
-                        <a:rPr sz="1160" b="0">
+                        <a:rPr sz="1240" b="0">
                           <a:solidFill>
                             <a:srgbClr val="000000"/>
                           </a:solidFill>
@@ -8250,7 +8250,7 @@
                         </a:spcAft>
                       </a:pPr>
                       <a:r>
-                        <a:rPr sz="1160" b="0">
+                        <a:rPr sz="1240" b="0">
                           <a:solidFill>
                             <a:srgbClr val="000000"/>
                           </a:solidFill>
@@ -8299,7 +8299,7 @@
                         </a:spcAft>
                       </a:pPr>
                       <a:r>
-                        <a:rPr sz="1160" b="1">
+                        <a:rPr sz="1240" b="1">
                           <a:solidFill>
                             <a:srgbClr val="009641"/>
                           </a:solidFill>
@@ -8328,7 +8328,7 @@
                         </a:spcAft>
                       </a:pPr>
                       <a:r>
-                        <a:rPr sz="1160" b="0">
+                        <a:rPr sz="1240" b="0">
                           <a:solidFill>
                             <a:srgbClr val="000000"/>
                           </a:solidFill>
@@ -8357,7 +8357,7 @@
                         </a:spcAft>
                       </a:pPr>
                       <a:r>
-                        <a:rPr sz="1160" b="0">
+                        <a:rPr sz="1240" b="0">
                           <a:solidFill>
                             <a:srgbClr val="009641"/>
                           </a:solidFill>
@@ -8386,7 +8386,7 @@
                         </a:spcAft>
                       </a:pPr>
                       <a:r>
-                        <a:rPr sz="1160" b="0">
+                        <a:rPr sz="1240" b="0">
                           <a:solidFill>
                             <a:srgbClr val="009641"/>
                           </a:solidFill>
@@ -8415,7 +8415,7 @@
                         </a:spcAft>
                       </a:pPr>
                       <a:r>
-                        <a:rPr sz="1160" b="0">
+                        <a:rPr sz="1240" b="0">
                           <a:solidFill>
                             <a:srgbClr val="009641"/>
                           </a:solidFill>
@@ -8444,7 +8444,7 @@
                         </a:spcAft>
                       </a:pPr>
                       <a:r>
-                        <a:rPr sz="1160" b="0">
+                        <a:rPr sz="1240" b="0">
                           <a:solidFill>
                             <a:srgbClr val="000000"/>
                           </a:solidFill>
@@ -8473,7 +8473,7 @@
                         </a:spcAft>
                       </a:pPr>
                       <a:r>
-                        <a:rPr sz="1160" b="0">
+                        <a:rPr sz="1240" b="0">
                           <a:solidFill>
                             <a:srgbClr val="000000"/>
                           </a:solidFill>
@@ -8502,7 +8502,7 @@
                         </a:spcAft>
                       </a:pPr>
                       <a:r>
-                        <a:rPr sz="1160" b="0">
+                        <a:rPr sz="1240" b="0">
                           <a:solidFill>
                             <a:srgbClr val="000000"/>
                           </a:solidFill>
@@ -8533,7 +8533,7 @@
                         </a:spcAft>
                       </a:pPr>
                       <a:r>
-                        <a:rPr sz="1160" b="1">
+                        <a:rPr sz="1240" b="1">
                           <a:solidFill>
                             <a:srgbClr val="000000"/>
                           </a:solidFill>
@@ -8562,7 +8562,7 @@
                         </a:spcAft>
                       </a:pPr>
                       <a:r>
-                        <a:rPr sz="1160" b="1">
+                        <a:rPr sz="1240" b="1">
                           <a:solidFill>
                             <a:srgbClr val="000000"/>
                           </a:solidFill>
@@ -8591,7 +8591,7 @@
                         </a:spcAft>
                       </a:pPr>
                       <a:r>
-                        <a:rPr sz="1160" b="0">
+                        <a:rPr sz="1240" b="0">
                           <a:solidFill>
                             <a:srgbClr val="000000"/>
                           </a:solidFill>
@@ -8620,7 +8620,7 @@
                         </a:spcAft>
                       </a:pPr>
                       <a:r>
-                        <a:rPr sz="1160" b="0">
+                        <a:rPr sz="1240" b="0">
                           <a:solidFill>
                             <a:srgbClr val="FF0000"/>
                           </a:solidFill>
@@ -8649,7 +8649,7 @@
                         </a:spcAft>
                       </a:pPr>
                       <a:r>
-                        <a:rPr sz="1160" b="0">
+                        <a:rPr sz="1240" b="0">
                           <a:solidFill>
                             <a:srgbClr val="009641"/>
                           </a:solidFill>
@@ -8678,7 +8678,7 @@
                         </a:spcAft>
                       </a:pPr>
                       <a:r>
-                        <a:rPr sz="1160" b="0">
+                        <a:rPr sz="1240" b="0">
                           <a:solidFill>
                             <a:srgbClr val="000000"/>
                           </a:solidFill>
@@ -8707,7 +8707,7 @@
                         </a:spcAft>
                       </a:pPr>
                       <a:r>
-                        <a:rPr sz="1160" b="0">
+                        <a:rPr sz="1240" b="0">
                           <a:solidFill>
                             <a:srgbClr val="000000"/>
                           </a:solidFill>
@@ -8736,7 +8736,7 @@
                         </a:spcAft>
                       </a:pPr>
                       <a:r>
-                        <a:rPr sz="1160" b="0">
+                        <a:rPr sz="1240" b="0">
                           <a:solidFill>
                             <a:srgbClr val="000000"/>
                           </a:solidFill>
@@ -8765,7 +8765,7 @@
                         </a:spcAft>
                       </a:pPr>
                       <a:r>
-                        <a:rPr sz="1160" b="0">
+                        <a:rPr sz="1240" b="0">
                           <a:solidFill>
                             <a:srgbClr val="000000"/>
                           </a:solidFill>
@@ -8814,7 +8814,7 @@
                         </a:spcAft>
                       </a:pPr>
                       <a:r>
-                        <a:rPr sz="1160" b="1">
+                        <a:rPr sz="1240" b="1">
                           <a:solidFill>
                             <a:srgbClr val="000000"/>
                           </a:solidFill>
@@ -8843,7 +8843,7 @@
                         </a:spcAft>
                       </a:pPr>
                       <a:r>
-                        <a:rPr sz="1160" b="0">
+                        <a:rPr sz="1240" b="0">
                           <a:solidFill>
                             <a:srgbClr val="000000"/>
                           </a:solidFill>
@@ -8872,7 +8872,7 @@
                         </a:spcAft>
                       </a:pPr>
                       <a:r>
-                        <a:rPr sz="1160" b="0">
+                        <a:rPr sz="1240" b="0">
                           <a:solidFill>
                             <a:srgbClr val="FF0000"/>
                           </a:solidFill>
@@ -8901,7 +8901,7 @@
                         </a:spcAft>
                       </a:pPr>
                       <a:r>
-                        <a:rPr sz="1160" b="0">
+                        <a:rPr sz="1240" b="0">
                           <a:solidFill>
                             <a:srgbClr val="FF0000"/>
                           </a:solidFill>
@@ -8930,7 +8930,7 @@
                         </a:spcAft>
                       </a:pPr>
                       <a:r>
-                        <a:rPr sz="1160" b="0">
+                        <a:rPr sz="1240" b="0">
                           <a:solidFill>
                             <a:srgbClr val="000000"/>
                           </a:solidFill>
@@ -8959,7 +8959,7 @@
                         </a:spcAft>
                       </a:pPr>
                       <a:r>
-                        <a:rPr sz="1160" b="0">
+                        <a:rPr sz="1240" b="0">
                           <a:solidFill>
                             <a:srgbClr val="000000"/>
                           </a:solidFill>
@@ -8988,7 +8988,7 @@
                         </a:spcAft>
                       </a:pPr>
                       <a:r>
-                        <a:rPr sz="1160" b="0">
+                        <a:rPr sz="1240" b="0">
                           <a:solidFill>
                             <a:srgbClr val="000000"/>
                           </a:solidFill>
@@ -9017,7 +9017,7 @@
                         </a:spcAft>
                       </a:pPr>
                       <a:r>
-                        <a:rPr sz="1160" b="0">
+                        <a:rPr sz="1240" b="0">
                           <a:solidFill>
                             <a:srgbClr val="000000"/>
                           </a:solidFill>
@@ -9066,7 +9066,7 @@
                         </a:spcAft>
                       </a:pPr>
                       <a:r>
-                        <a:rPr sz="1160" b="1">
+                        <a:rPr sz="1240" b="1">
                           <a:solidFill>
                             <a:srgbClr val="009641"/>
                           </a:solidFill>
@@ -9095,7 +9095,7 @@
                         </a:spcAft>
                       </a:pPr>
                       <a:r>
-                        <a:rPr sz="1160" b="0">
+                        <a:rPr sz="1240" b="0">
                           <a:solidFill>
                             <a:srgbClr val="000000"/>
                           </a:solidFill>
@@ -9124,7 +9124,7 @@
                         </a:spcAft>
                       </a:pPr>
                       <a:r>
-                        <a:rPr sz="1160" b="0">
+                        <a:rPr sz="1240" b="0">
                           <a:solidFill>
                             <a:srgbClr val="009641"/>
                           </a:solidFill>
@@ -9153,7 +9153,7 @@
                         </a:spcAft>
                       </a:pPr>
                       <a:r>
-                        <a:rPr sz="1160" b="0">
+                        <a:rPr sz="1240" b="0">
                           <a:solidFill>
                             <a:srgbClr val="009641"/>
                           </a:solidFill>
@@ -9182,7 +9182,7 @@
                         </a:spcAft>
                       </a:pPr>
                       <a:r>
-                        <a:rPr sz="1160" b="0">
+                        <a:rPr sz="1240" b="0">
                           <a:solidFill>
                             <a:srgbClr val="009641"/>
                           </a:solidFill>
@@ -9211,7 +9211,7 @@
                         </a:spcAft>
                       </a:pPr>
                       <a:r>
-                        <a:rPr sz="1160" b="0">
+                        <a:rPr sz="1240" b="0">
                           <a:solidFill>
                             <a:srgbClr val="000000"/>
                           </a:solidFill>
@@ -9240,7 +9240,7 @@
                         </a:spcAft>
                       </a:pPr>
                       <a:r>
-                        <a:rPr sz="1160" b="0">
+                        <a:rPr sz="1240" b="0">
                           <a:solidFill>
                             <a:srgbClr val="000000"/>
                           </a:solidFill>
@@ -9269,7 +9269,7 @@
                         </a:spcAft>
                       </a:pPr>
                       <a:r>
-                        <a:rPr sz="1160" b="0">
+                        <a:rPr sz="1240" b="0">
                           <a:solidFill>
                             <a:srgbClr val="000000"/>
                           </a:solidFill>
@@ -10106,397 +10106,25 @@
       </p:pic>
       <p:sp>
         <p:nvSpPr>
-          <p:cNvPr id="4" name="TextBox 3"/>
-          <p:cNvSpPr txBox="1"/>
-          <p:nvPr/>
-        </p:nvSpPr>
-        <p:spPr>
-          <a:xfrm>
-            <a:off x="2971800" y="100584"/>
-            <a:ext cx="7040880" cy="566928"/>
-          </a:xfrm>
-          <a:prstGeom prst="rect">
-            <a:avLst/>
-          </a:prstGeom>
-          <a:noFill/>
-        </p:spPr>
-        <p:txBody>
-          <a:bodyPr wrap="square">
-            <a:spAutoFit/>
-          </a:bodyPr>
-          <a:lstStyle/>
-          <a:p>
-            <a:pPr algn="l"/>
-            <a:r>
-              <a:rPr sz="2800" b="1">
-                <a:solidFill>
-                  <a:srgbClr val="000000"/>
-                </a:solidFill>
-                <a:latin typeface="Times New Roman"/>
-                <a:ea typeface="Times New Roman"/>
-                <a:cs typeface="Times New Roman"/>
-              </a:rPr>
-              <a:t>Part. 03  实验结果分析</a:t>
-            </a:r>
-          </a:p>
-        </p:txBody>
-      </p:sp>
-      <p:sp>
-        <p:nvSpPr>
-          <p:cNvPr id="5" name="TextBox 4"/>
-          <p:cNvSpPr txBox="1"/>
-          <p:nvPr/>
-        </p:nvSpPr>
-        <p:spPr>
-          <a:xfrm>
-            <a:off x="640080" y="1024128"/>
-            <a:ext cx="7772400" cy="493776"/>
-          </a:xfrm>
-          <a:prstGeom prst="rect">
-            <a:avLst/>
-          </a:prstGeom>
-          <a:noFill/>
-        </p:spPr>
-        <p:txBody>
-          <a:bodyPr wrap="square">
-            <a:spAutoFit/>
-          </a:bodyPr>
-          <a:lstStyle/>
-          <a:p>
-            <a:pPr algn="l"/>
-            <a:r>
-              <a:rPr sz="2000" b="1">
-                <a:solidFill>
-                  <a:srgbClr val="000000"/>
-                </a:solidFill>
-                <a:latin typeface="Times New Roman"/>
-                <a:ea typeface="Times New Roman"/>
-                <a:cs typeface="Times New Roman"/>
-              </a:rPr>
-              <a:t>3.5 计算时间与轨迹质量</a:t>
-            </a:r>
-          </a:p>
-        </p:txBody>
-      </p:sp>
-      <p:sp>
-        <p:nvSpPr>
-          <p:cNvPr id="6" name="TextBox 5"/>
-          <p:cNvSpPr txBox="1"/>
-          <p:nvPr/>
-        </p:nvSpPr>
-        <p:spPr>
-          <a:xfrm>
-            <a:off x="566928" y="1609344"/>
-            <a:ext cx="11009376" cy="640080"/>
-          </a:xfrm>
-          <a:prstGeom prst="rect">
-            <a:avLst/>
-          </a:prstGeom>
-          <a:noFill/>
-        </p:spPr>
-        <p:txBody>
-          <a:bodyPr wrap="square" lIns="0" rIns="0" tIns="0" bIns="0">
-            <a:spAutoFit/>
-          </a:bodyPr>
-          <a:lstStyle/>
-          <a:p>
-            <a:pPr algn="l" marL="210000" indent="-140000">
-              <a:lnSpc>
-                <a:spcPct val="102000"/>
-              </a:lnSpc>
-              <a:spcBef>
-                <a:spcPts val="0"/>
-              </a:spcBef>
-              <a:spcAft>
-                <a:spcPts val="0"/>
-              </a:spcAft>
-            </a:pPr>
-            <a:r>
-              <a:rPr sz="1920" b="1">
-                <a:solidFill>
-                  <a:srgbClr val="000000"/>
-                </a:solidFill>
-                <a:latin typeface="Times New Roman"/>
-                <a:ea typeface="Times New Roman"/>
-                <a:cs typeface="Times New Roman"/>
-              </a:rPr>
-              <a:t>● Fig.5对计算时间、travel time、加速度平滑性和jerk平滑性进行分布式比较。</a:t>
-            </a:r>
-          </a:p>
-        </p:txBody>
-      </p:sp>
-      <p:pic>
-        <p:nvPicPr>
-          <p:cNvPr id="7" name="Picture 6" descr="fig5_benchmark_clean.png"/>
-          <p:cNvPicPr>
-            <a:picLocks noChangeAspect="1"/>
-          </p:cNvPicPr>
-          <p:nvPr/>
-        </p:nvPicPr>
-        <p:blipFill>
-          <a:blip ns2:embed="rId3"/>
-          <a:stretch>
-            <a:fillRect/>
-          </a:stretch>
-        </p:blipFill>
-        <p:spPr>
-          <a:xfrm>
-            <a:off x="1766316" y="2340864"/>
-            <a:ext cx="5026152" cy="3547872"/>
-          </a:xfrm>
-          <a:prstGeom prst="rect">
-            <a:avLst/>
-          </a:prstGeom>
-        </p:spPr>
-      </p:pic>
-      <p:sp>
-        <p:nvSpPr>
-          <p:cNvPr id="8" name="TextBox 7"/>
-          <p:cNvSpPr txBox="1"/>
-          <p:nvPr/>
-        </p:nvSpPr>
-        <p:spPr>
-          <a:xfrm>
-            <a:off x="8193024" y="2414016"/>
-            <a:ext cx="3236976" cy="3255264"/>
-          </a:xfrm>
-          <a:prstGeom prst="rect">
-            <a:avLst/>
-          </a:prstGeom>
-          <a:noFill/>
-        </p:spPr>
-        <p:txBody>
-          <a:bodyPr wrap="square" lIns="0" rIns="0" tIns="0" bIns="0">
-            <a:spAutoFit/>
-          </a:bodyPr>
-          <a:lstStyle/>
-          <a:p>
-            <a:pPr algn="l" marL="210000" indent="-140000">
-              <a:lnSpc>
-                <a:spcPct val="94000"/>
-              </a:lnSpc>
-              <a:spcBef>
-                <a:spcPts val="0"/>
-              </a:spcBef>
-              <a:spcAft>
-                <a:spcPts val="0"/>
-              </a:spcAft>
-            </a:pPr>
-            <a:r>
-              <a:rPr sz="1920" b="1">
-                <a:solidFill>
-                  <a:srgbClr val="000000"/>
-                </a:solidFill>
-                <a:latin typeface="Times New Roman"/>
-                <a:ea typeface="Times New Roman"/>
-                <a:cs typeface="Times New Roman"/>
-              </a:rPr>
-              <a:t>● </a:t>
-            </a:r>
-            <a:r>
-              <a:rPr sz="1920" b="1">
-                <a:solidFill>
-                  <a:srgbClr val="FF0000"/>
-                </a:solidFill>
-                <a:latin typeface="Times New Roman"/>
-                <a:ea typeface="Times New Roman"/>
-                <a:cs typeface="Times New Roman"/>
-              </a:rPr>
-              <a:t>PRIMER</a:t>
-            </a:r>
-            <a:r>
-              <a:rPr sz="1920" b="1">
-                <a:solidFill>
-                  <a:srgbClr val="000000"/>
-                </a:solidFill>
-                <a:latin typeface="Times New Roman"/>
-                <a:ea typeface="Times New Roman"/>
-                <a:cs typeface="Times New Roman"/>
-              </a:rPr>
-              <a:t> 的计算时间分布明显低于 </a:t>
-            </a:r>
-            <a:r>
-              <a:rPr sz="1920" b="1">
-                <a:solidFill>
-                  <a:srgbClr val="FF0000"/>
-                </a:solidFill>
-                <a:latin typeface="Times New Roman"/>
-                <a:ea typeface="Times New Roman"/>
-                <a:cs typeface="Times New Roman"/>
-              </a:rPr>
-              <a:t>PARM</a:t>
-            </a:r>
-            <a:r>
-              <a:rPr sz="1920" b="1">
-                <a:solidFill>
-                  <a:srgbClr val="000000"/>
-                </a:solidFill>
-                <a:latin typeface="Times New Roman"/>
-                <a:ea typeface="Times New Roman"/>
-                <a:cs typeface="Times New Roman"/>
-              </a:rPr>
-              <a:t>/</a:t>
-            </a:r>
-            <a:r>
-              <a:rPr sz="1920" b="1">
-                <a:solidFill>
-                  <a:srgbClr val="FF0000"/>
-                </a:solidFill>
-                <a:latin typeface="Times New Roman"/>
-                <a:ea typeface="Times New Roman"/>
-                <a:cs typeface="Times New Roman"/>
-              </a:rPr>
-              <a:t>PARM*</a:t>
-            </a:r>
-            <a:r>
-              <a:rPr sz="1920" b="1">
-                <a:solidFill>
-                  <a:srgbClr val="000000"/>
-                </a:solidFill>
-                <a:latin typeface="Times New Roman"/>
-                <a:ea typeface="Times New Roman"/>
-                <a:cs typeface="Times New Roman"/>
-              </a:rPr>
-              <a:t>。</a:t>
-            </a:r>
-          </a:p>
-          <a:p>
-            <a:pPr algn="l" marL="350000" indent="-120000">
-              <a:lnSpc>
-                <a:spcPct val="94000"/>
-              </a:lnSpc>
-              <a:spcBef>
-                <a:spcPts val="0"/>
-              </a:spcBef>
-              <a:spcAft>
-                <a:spcPts val="0"/>
-              </a:spcAft>
-            </a:pPr>
-            <a:r>
-              <a:rPr sz="1840" b="0">
-                <a:solidFill>
-                  <a:srgbClr val="000000"/>
-                </a:solidFill>
-                <a:latin typeface="Times New Roman"/>
-                <a:ea typeface="Times New Roman"/>
-                <a:cs typeface="Times New Roman"/>
-              </a:rPr>
-              <a:t>• 6-trajectory优化能提高轨迹平滑性，但计算时间显著增加。</a:t>
-            </a:r>
-          </a:p>
-          <a:p>
-            <a:pPr algn="l" marL="350000" indent="-120000">
-              <a:lnSpc>
-                <a:spcPct val="94000"/>
-              </a:lnSpc>
-              <a:spcBef>
-                <a:spcPts val="0"/>
-              </a:spcBef>
-              <a:spcAft>
-                <a:spcPts val="0"/>
-              </a:spcAft>
-            </a:pPr>
-            <a:r>
-              <a:rPr sz="1840" b="0">
-                <a:solidFill>
-                  <a:srgbClr val="000000"/>
-                </a:solidFill>
-                <a:latin typeface="Times New Roman"/>
-                <a:ea typeface="Times New Roman"/>
-                <a:cs typeface="Times New Roman"/>
-              </a:rPr>
-              <a:t>• </a:t>
-            </a:r>
-            <a:r>
-              <a:rPr sz="1840" b="1">
-                <a:solidFill>
-                  <a:srgbClr val="FF0000"/>
-                </a:solidFill>
-                <a:latin typeface="Times New Roman"/>
-                <a:ea typeface="Times New Roman"/>
-                <a:cs typeface="Times New Roman"/>
-              </a:rPr>
-              <a:t>PRIMER</a:t>
-            </a:r>
-            <a:r>
-              <a:rPr sz="1840" b="0">
-                <a:solidFill>
-                  <a:srgbClr val="000000"/>
-                </a:solidFill>
-                <a:latin typeface="Times New Roman"/>
-                <a:ea typeface="Times New Roman"/>
-                <a:cs typeface="Times New Roman"/>
-              </a:rPr>
-              <a:t> 在smoothness上接近 </a:t>
-            </a:r>
-            <a:r>
-              <a:rPr sz="1840" b="1">
-                <a:solidFill>
-                  <a:srgbClr val="FF0000"/>
-                </a:solidFill>
-                <a:latin typeface="Times New Roman"/>
-                <a:ea typeface="Times New Roman"/>
-                <a:cs typeface="Times New Roman"/>
-              </a:rPr>
-              <a:t>PARM*</a:t>
-            </a:r>
-            <a:r>
-              <a:rPr sz="1840" b="0">
-                <a:solidFill>
-                  <a:srgbClr val="000000"/>
-                </a:solidFill>
-                <a:latin typeface="Times New Roman"/>
-                <a:ea typeface="Times New Roman"/>
-                <a:cs typeface="Times New Roman"/>
-              </a:rPr>
-              <a:t>，同时travel time更短。</a:t>
-            </a:r>
-          </a:p>
-          <a:p>
-            <a:pPr algn="l" marL="350000" indent="-120000">
-              <a:lnSpc>
-                <a:spcPct val="94000"/>
-              </a:lnSpc>
-              <a:spcBef>
-                <a:spcPts val="0"/>
-              </a:spcBef>
-              <a:spcAft>
-                <a:spcPts val="0"/>
-              </a:spcAft>
-            </a:pPr>
-            <a:r>
-              <a:rPr sz="1840" b="0">
-                <a:solidFill>
-                  <a:srgbClr val="000000"/>
-                </a:solidFill>
-                <a:latin typeface="Times New Roman"/>
-                <a:ea typeface="Times New Roman"/>
-                <a:cs typeface="Times New Roman"/>
-              </a:rPr>
-              <a:t>• 结果体现出学习式部署在高频重规划中的优势。</a:t>
-            </a:r>
-          </a:p>
-        </p:txBody>
-      </p:sp>
-      <p:sp>
-        <p:nvSpPr>
-          <p:cNvPr id="9" name="Rectangle 8"/>
+          <p:cNvPr id="11" name="DENSITY_TAKEAWAY_PANEL"/>
           <p:cNvSpPr/>
           <p:nvPr/>
         </p:nvSpPr>
         <p:spPr>
           <a:xfrm>
-            <a:off x="694944" y="6035040"/>
-            <a:ext cx="10789920" cy="16459"/>
+            <a:off x="786384" y="6016752"/>
+            <a:ext cx="10643616" cy="457200"/>
           </a:xfrm>
           <a:prstGeom prst="rect">
             <a:avLst/>
           </a:prstGeom>
           <a:solidFill>
-            <a:srgbClr val="BEBEBE"/>
+            <a:srgbClr val="F2F4F7"/>
           </a:solidFill>
-          <a:ln>
-            <a:noFill/>
+          <a:ln w="8890">
+            <a:solidFill>
+              <a:srgbClr val="D6DAE0"/>
+            </a:solidFill>
           </a:ln>
         </p:spPr>
         <p:style>
@@ -10516,14 +10144,424 @@
       </p:sp>
       <p:sp>
         <p:nvSpPr>
+          <p:cNvPr id="4" name="TextBox 3"/>
+          <p:cNvSpPr txBox="1"/>
+          <p:nvPr/>
+        </p:nvSpPr>
+        <p:spPr>
+          <a:xfrm>
+            <a:off x="2971800" y="100584"/>
+            <a:ext cx="7040880" cy="566928"/>
+          </a:xfrm>
+          <a:prstGeom prst="rect">
+            <a:avLst/>
+          </a:prstGeom>
+          <a:noFill/>
+        </p:spPr>
+        <p:txBody>
+          <a:bodyPr wrap="square">
+            <a:spAutoFit/>
+          </a:bodyPr>
+          <a:lstStyle/>
+          <a:p>
+            <a:pPr algn="l"/>
+            <a:r>
+              <a:rPr sz="2800" b="1">
+                <a:solidFill>
+                  <a:srgbClr val="000000"/>
+                </a:solidFill>
+                <a:latin typeface="Times New Roman"/>
+                <a:ea typeface="Times New Roman"/>
+                <a:cs typeface="Times New Roman"/>
+              </a:rPr>
+              <a:t>Part. 03  实验结果分析</a:t>
+            </a:r>
+          </a:p>
+        </p:txBody>
+      </p:sp>
+      <p:sp>
+        <p:nvSpPr>
+          <p:cNvPr id="5" name="TextBox 4"/>
+          <p:cNvSpPr txBox="1"/>
+          <p:nvPr/>
+        </p:nvSpPr>
+        <p:spPr>
+          <a:xfrm>
+            <a:off x="640080" y="1024128"/>
+            <a:ext cx="7772400" cy="493776"/>
+          </a:xfrm>
+          <a:prstGeom prst="rect">
+            <a:avLst/>
+          </a:prstGeom>
+          <a:noFill/>
+        </p:spPr>
+        <p:txBody>
+          <a:bodyPr wrap="square">
+            <a:spAutoFit/>
+          </a:bodyPr>
+          <a:lstStyle/>
+          <a:p>
+            <a:pPr algn="l"/>
+            <a:r>
+              <a:rPr sz="2000" b="1">
+                <a:solidFill>
+                  <a:srgbClr val="000000"/>
+                </a:solidFill>
+                <a:latin typeface="Times New Roman"/>
+                <a:ea typeface="Times New Roman"/>
+                <a:cs typeface="Times New Roman"/>
+              </a:rPr>
+              <a:t>3.5 计算时间与轨迹质量</a:t>
+            </a:r>
+          </a:p>
+        </p:txBody>
+      </p:sp>
+      <p:sp>
+        <p:nvSpPr>
+          <p:cNvPr id="6" name="TextBox 5"/>
+          <p:cNvSpPr txBox="1"/>
+          <p:nvPr/>
+        </p:nvSpPr>
+        <p:spPr>
+          <a:xfrm>
+            <a:off x="566928" y="1609344"/>
+            <a:ext cx="11009376" cy="640080"/>
+          </a:xfrm>
+          <a:prstGeom prst="rect">
+            <a:avLst/>
+          </a:prstGeom>
+          <a:noFill/>
+        </p:spPr>
+        <p:txBody>
+          <a:bodyPr wrap="square" lIns="0" rIns="0" tIns="0" bIns="0">
+            <a:spAutoFit/>
+          </a:bodyPr>
+          <a:lstStyle/>
+          <a:p>
+            <a:pPr algn="l" marL="210000" indent="-140000">
+              <a:lnSpc>
+                <a:spcPct val="102000"/>
+              </a:lnSpc>
+              <a:spcBef>
+                <a:spcPts val="0"/>
+              </a:spcBef>
+              <a:spcAft>
+                <a:spcPts val="0"/>
+              </a:spcAft>
+            </a:pPr>
+            <a:r>
+              <a:rPr sz="1920" b="1">
+                <a:solidFill>
+                  <a:srgbClr val="000000"/>
+                </a:solidFill>
+                <a:latin typeface="Times New Roman"/>
+                <a:ea typeface="Times New Roman"/>
+                <a:cs typeface="Times New Roman"/>
+              </a:rPr>
+              <a:t>● Fig.5对计算时间、travel time、加速度平滑性和jerk平滑性进行分布式比较。</a:t>
+            </a:r>
+          </a:p>
+        </p:txBody>
+      </p:sp>
+      <p:pic>
+        <p:nvPicPr>
+          <p:cNvPr id="7" name="Picture 6" descr="fig5_benchmark_clean.png"/>
+          <p:cNvPicPr>
+            <a:picLocks noChangeAspect="1"/>
+          </p:cNvPicPr>
+          <p:nvPr/>
+        </p:nvPicPr>
+        <p:blipFill>
+          <a:blip ns2:embed="rId3"/>
+          <a:stretch>
+            <a:fillRect/>
+          </a:stretch>
+        </p:blipFill>
+        <p:spPr>
+          <a:xfrm>
+            <a:off x="1078992" y="2212848"/>
+            <a:ext cx="5257800" cy="3712463"/>
+          </a:xfrm>
+          <a:prstGeom prst="rect">
+            <a:avLst/>
+          </a:prstGeom>
+        </p:spPr>
+      </p:pic>
+      <p:sp>
+        <p:nvSpPr>
+          <p:cNvPr id="8" name="TextBox 7"/>
+          <p:cNvSpPr txBox="1"/>
+          <p:nvPr/>
+        </p:nvSpPr>
+        <p:spPr>
+          <a:xfrm>
+            <a:off x="7040880" y="2304288"/>
+            <a:ext cx="4315968" cy="3328416"/>
+          </a:xfrm>
+          <a:prstGeom prst="rect">
+            <a:avLst/>
+          </a:prstGeom>
+          <a:noFill/>
+        </p:spPr>
+        <p:txBody>
+          <a:bodyPr wrap="square" lIns="0" rIns="0" tIns="0" bIns="0">
+            <a:spAutoFit/>
+          </a:bodyPr>
+          <a:lstStyle/>
+          <a:p>
+            <a:pPr algn="l" marL="210000" indent="-140000">
+              <a:lnSpc>
+                <a:spcPct val="94000"/>
+              </a:lnSpc>
+              <a:spcBef>
+                <a:spcPts val="0"/>
+              </a:spcBef>
+              <a:spcAft>
+                <a:spcPts val="0"/>
+              </a:spcAft>
+            </a:pPr>
+            <a:r>
+              <a:rPr sz="1920" b="1">
+                <a:solidFill>
+                  <a:srgbClr val="000000"/>
+                </a:solidFill>
+                <a:latin typeface="Times New Roman"/>
+                <a:ea typeface="Times New Roman"/>
+                <a:cs typeface="Times New Roman"/>
+              </a:rPr>
+              <a:t>● </a:t>
+            </a:r>
+            <a:r>
+              <a:rPr sz="1920" b="1">
+                <a:solidFill>
+                  <a:srgbClr val="FF0000"/>
+                </a:solidFill>
+                <a:latin typeface="Times New Roman"/>
+                <a:ea typeface="Times New Roman"/>
+                <a:cs typeface="Times New Roman"/>
+              </a:rPr>
+              <a:t>PRIMER</a:t>
+            </a:r>
+            <a:r>
+              <a:rPr sz="1920" b="1">
+                <a:solidFill>
+                  <a:srgbClr val="000000"/>
+                </a:solidFill>
+                <a:latin typeface="Times New Roman"/>
+                <a:ea typeface="Times New Roman"/>
+                <a:cs typeface="Times New Roman"/>
+              </a:rPr>
+              <a:t> 的计算时间分布明显低于 </a:t>
+            </a:r>
+            <a:r>
+              <a:rPr sz="1920" b="1">
+                <a:solidFill>
+                  <a:srgbClr val="FF0000"/>
+                </a:solidFill>
+                <a:latin typeface="Times New Roman"/>
+                <a:ea typeface="Times New Roman"/>
+                <a:cs typeface="Times New Roman"/>
+              </a:rPr>
+              <a:t>PARM</a:t>
+            </a:r>
+            <a:r>
+              <a:rPr sz="1920" b="1">
+                <a:solidFill>
+                  <a:srgbClr val="000000"/>
+                </a:solidFill>
+                <a:latin typeface="Times New Roman"/>
+                <a:ea typeface="Times New Roman"/>
+                <a:cs typeface="Times New Roman"/>
+              </a:rPr>
+              <a:t>/</a:t>
+            </a:r>
+            <a:r>
+              <a:rPr sz="1920" b="1">
+                <a:solidFill>
+                  <a:srgbClr val="FF0000"/>
+                </a:solidFill>
+                <a:latin typeface="Times New Roman"/>
+                <a:ea typeface="Times New Roman"/>
+                <a:cs typeface="Times New Roman"/>
+              </a:rPr>
+              <a:t>PARM*</a:t>
+            </a:r>
+            <a:r>
+              <a:rPr sz="1920" b="1">
+                <a:solidFill>
+                  <a:srgbClr val="000000"/>
+                </a:solidFill>
+                <a:latin typeface="Times New Roman"/>
+                <a:ea typeface="Times New Roman"/>
+                <a:cs typeface="Times New Roman"/>
+              </a:rPr>
+              <a:t>。</a:t>
+            </a:r>
+          </a:p>
+          <a:p>
+            <a:pPr algn="l" marL="350000" indent="-120000">
+              <a:lnSpc>
+                <a:spcPct val="94000"/>
+              </a:lnSpc>
+              <a:spcBef>
+                <a:spcPts val="0"/>
+              </a:spcBef>
+              <a:spcAft>
+                <a:spcPts val="0"/>
+              </a:spcAft>
+            </a:pPr>
+            <a:r>
+              <a:rPr sz="1840" b="0">
+                <a:solidFill>
+                  <a:srgbClr val="000000"/>
+                </a:solidFill>
+                <a:latin typeface="Times New Roman"/>
+                <a:ea typeface="Times New Roman"/>
+                <a:cs typeface="Times New Roman"/>
+              </a:rPr>
+              <a:t>• 6-trajectory优化能提高轨迹平滑性，但计算时间显著增加。</a:t>
+            </a:r>
+          </a:p>
+          <a:p>
+            <a:pPr algn="l" marL="350000" indent="-120000">
+              <a:lnSpc>
+                <a:spcPct val="94000"/>
+              </a:lnSpc>
+              <a:spcBef>
+                <a:spcPts val="0"/>
+              </a:spcBef>
+              <a:spcAft>
+                <a:spcPts val="0"/>
+              </a:spcAft>
+            </a:pPr>
+            <a:r>
+              <a:rPr sz="1840" b="0">
+                <a:solidFill>
+                  <a:srgbClr val="000000"/>
+                </a:solidFill>
+                <a:latin typeface="Times New Roman"/>
+                <a:ea typeface="Times New Roman"/>
+                <a:cs typeface="Times New Roman"/>
+              </a:rPr>
+              <a:t>• </a:t>
+            </a:r>
+            <a:r>
+              <a:rPr sz="1840" b="1">
+                <a:solidFill>
+                  <a:srgbClr val="FF0000"/>
+                </a:solidFill>
+                <a:latin typeface="Times New Roman"/>
+                <a:ea typeface="Times New Roman"/>
+                <a:cs typeface="Times New Roman"/>
+              </a:rPr>
+              <a:t>PRIMER</a:t>
+            </a:r>
+            <a:r>
+              <a:rPr sz="1840" b="0">
+                <a:solidFill>
+                  <a:srgbClr val="000000"/>
+                </a:solidFill>
+                <a:latin typeface="Times New Roman"/>
+                <a:ea typeface="Times New Roman"/>
+                <a:cs typeface="Times New Roman"/>
+              </a:rPr>
+              <a:t> 在smoothness上接近 </a:t>
+            </a:r>
+            <a:r>
+              <a:rPr sz="1840" b="1">
+                <a:solidFill>
+                  <a:srgbClr val="FF0000"/>
+                </a:solidFill>
+                <a:latin typeface="Times New Roman"/>
+                <a:ea typeface="Times New Roman"/>
+                <a:cs typeface="Times New Roman"/>
+              </a:rPr>
+              <a:t>PARM*</a:t>
+            </a:r>
+            <a:r>
+              <a:rPr sz="1840" b="0">
+                <a:solidFill>
+                  <a:srgbClr val="000000"/>
+                </a:solidFill>
+                <a:latin typeface="Times New Roman"/>
+                <a:ea typeface="Times New Roman"/>
+                <a:cs typeface="Times New Roman"/>
+              </a:rPr>
+              <a:t>，同时travel time更短。</a:t>
+            </a:r>
+          </a:p>
+          <a:p>
+            <a:pPr algn="l" marL="350000" indent="-120000">
+              <a:lnSpc>
+                <a:spcPct val="94000"/>
+              </a:lnSpc>
+              <a:spcBef>
+                <a:spcPts val="0"/>
+              </a:spcBef>
+              <a:spcAft>
+                <a:spcPts val="0"/>
+              </a:spcAft>
+            </a:pPr>
+            <a:r>
+              <a:rPr sz="1840" b="0">
+                <a:solidFill>
+                  <a:srgbClr val="000000"/>
+                </a:solidFill>
+                <a:latin typeface="Times New Roman"/>
+                <a:ea typeface="Times New Roman"/>
+                <a:cs typeface="Times New Roman"/>
+              </a:rPr>
+              <a:t>• 结果体现出学习式部署在高频重规划中的优势。</a:t>
+            </a:r>
+          </a:p>
+        </p:txBody>
+      </p:sp>
+      <p:sp>
+        <p:nvSpPr>
+          <p:cNvPr id="9" name="Rectangle 8"/>
+          <p:cNvSpPr/>
+          <p:nvPr/>
+        </p:nvSpPr>
+        <p:spPr>
+          <a:xfrm>
+            <a:off x="694944" y="5943600"/>
+            <a:ext cx="10789920" cy="18288"/>
+          </a:xfrm>
+          <a:prstGeom prst="rect">
+            <a:avLst/>
+          </a:prstGeom>
+          <a:solidFill>
+            <a:srgbClr val="BEBEBE"/>
+          </a:solidFill>
+          <a:ln>
+            <a:noFill/>
+          </a:ln>
+        </p:spPr>
+        <p:style>
+          <a:lnRef idx="1">
+            <a:schemeClr val="accent1"/>
+          </a:lnRef>
+          <a:fillRef idx="3">
+            <a:schemeClr val="accent1"/>
+          </a:fillRef>
+          <a:effectRef idx="2">
+            <a:schemeClr val="accent1"/>
+          </a:effectRef>
+          <a:fontRef idx="minor">
+            <a:schemeClr val="lt1"/>
+          </a:fontRef>
+        </p:style>
+      </p:sp>
+      <p:sp>
+        <p:nvSpPr>
           <p:cNvPr id="10" name="TextBox 9"/>
           <p:cNvSpPr txBox="1"/>
           <p:nvPr/>
         </p:nvSpPr>
         <p:spPr>
           <a:xfrm>
-            <a:off x="676656" y="6199632"/>
-            <a:ext cx="10899648" cy="310896"/>
+            <a:off x="896112" y="6108192"/>
+            <a:ext cx="10314432" cy="292608"/>
           </a:xfrm>
           <a:prstGeom prst="rect">
             <a:avLst/>
@@ -15116,7 +15154,7 @@
                         </a:spcAft>
                       </a:pPr>
                       <a:r>
-                        <a:rPr sz="1340" b="1">
+                        <a:rPr sz="1240" b="1">
                           <a:solidFill>
                             <a:srgbClr val="000000"/>
                           </a:solidFill>
@@ -15145,7 +15183,7 @@
                         </a:spcAft>
                       </a:pPr>
                       <a:r>
-                        <a:rPr sz="1340" b="1">
+                        <a:rPr sz="1240" b="1">
                           <a:solidFill>
                             <a:srgbClr val="000000"/>
                           </a:solidFill>
@@ -15174,7 +15212,7 @@
                         </a:spcAft>
                       </a:pPr>
                       <a:r>
-                        <a:rPr sz="1340" b="1">
+                        <a:rPr sz="1240" b="1">
                           <a:solidFill>
                             <a:srgbClr val="000000"/>
                           </a:solidFill>
@@ -15203,7 +15241,7 @@
                         </a:spcAft>
                       </a:pPr>
                       <a:r>
-                        <a:rPr sz="1340" b="1">
+                        <a:rPr sz="1240" b="1">
                           <a:solidFill>
                             <a:srgbClr val="000000"/>
                           </a:solidFill>
@@ -15232,7 +15270,7 @@
                         </a:spcAft>
                       </a:pPr>
                       <a:r>
-                        <a:rPr sz="1340" b="1">
+                        <a:rPr sz="1240" b="1">
                           <a:solidFill>
                             <a:srgbClr val="000000"/>
                           </a:solidFill>
@@ -15263,7 +15301,7 @@
                         </a:spcAft>
                       </a:pPr>
                       <a:r>
-                        <a:rPr sz="1340" b="1">
+                        <a:rPr sz="1240" b="1">
                           <a:solidFill>
                             <a:srgbClr val="000000"/>
                           </a:solidFill>
@@ -15292,7 +15330,7 @@
                         </a:spcAft>
                       </a:pPr>
                       <a:r>
-                        <a:rPr sz="1340" b="1">
+                        <a:rPr sz="1240" b="1">
                           <a:solidFill>
                             <a:srgbClr val="009641"/>
                           </a:solidFill>
@@ -15321,7 +15359,7 @@
                         </a:spcAft>
                       </a:pPr>
                       <a:r>
-                        <a:rPr sz="1340" b="0">
+                        <a:rPr sz="1240" b="0">
                           <a:solidFill>
                             <a:srgbClr val="FF0000"/>
                           </a:solidFill>
@@ -15350,7 +15388,7 @@
                         </a:spcAft>
                       </a:pPr>
                       <a:r>
-                        <a:rPr sz="1340" b="0">
+                        <a:rPr sz="1240" b="0">
                           <a:solidFill>
                             <a:srgbClr val="FF0000"/>
                           </a:solidFill>
@@ -15379,7 +15417,7 @@
                         </a:spcAft>
                       </a:pPr>
                       <a:r>
-                        <a:rPr sz="1340" b="0">
+                        <a:rPr sz="1240" b="0">
                           <a:solidFill>
                             <a:srgbClr val="000000"/>
                           </a:solidFill>
@@ -15410,7 +15448,7 @@
                         </a:spcAft>
                       </a:pPr>
                       <a:r>
-                        <a:rPr sz="1340" b="1">
+                        <a:rPr sz="1240" b="1">
                           <a:solidFill>
                             <a:srgbClr val="000000"/>
                           </a:solidFill>
@@ -15439,7 +15477,7 @@
                         </a:spcAft>
                       </a:pPr>
                       <a:r>
-                        <a:rPr sz="1340" b="1">
+                        <a:rPr sz="1240" b="1">
                           <a:solidFill>
                             <a:srgbClr val="FF0000"/>
                           </a:solidFill>
@@ -15468,7 +15506,7 @@
                         </a:spcAft>
                       </a:pPr>
                       <a:r>
-                        <a:rPr sz="1340" b="0">
+                        <a:rPr sz="1240" b="0">
                           <a:solidFill>
                             <a:srgbClr val="009641"/>
                           </a:solidFill>
@@ -15497,7 +15535,7 @@
                         </a:spcAft>
                       </a:pPr>
                       <a:r>
-                        <a:rPr sz="1340" b="0">
+                        <a:rPr sz="1240" b="0">
                           <a:solidFill>
                             <a:srgbClr val="FF0000"/>
                           </a:solidFill>
@@ -15526,7 +15564,7 @@
                         </a:spcAft>
                       </a:pPr>
                       <a:r>
-                        <a:rPr sz="1340" b="0">
+                        <a:rPr sz="1240" b="0">
                           <a:solidFill>
                             <a:srgbClr val="000000"/>
                           </a:solidFill>
@@ -15557,7 +15595,7 @@
                         </a:spcAft>
                       </a:pPr>
                       <a:r>
-                        <a:rPr sz="1340" b="1">
+                        <a:rPr sz="1240" b="1">
                           <a:solidFill>
                             <a:srgbClr val="000000"/>
                           </a:solidFill>
@@ -15586,7 +15624,7 @@
                         </a:spcAft>
                       </a:pPr>
                       <a:r>
-                        <a:rPr sz="1340" b="1">
+                        <a:rPr sz="1240" b="1">
                           <a:solidFill>
                             <a:srgbClr val="FF0000"/>
                           </a:solidFill>
@@ -15615,7 +15653,7 @@
                         </a:spcAft>
                       </a:pPr>
                       <a:r>
-                        <a:rPr sz="1340" b="0">
+                        <a:rPr sz="1240" b="0">
                           <a:solidFill>
                             <a:srgbClr val="009641"/>
                           </a:solidFill>
@@ -15644,7 +15682,7 @@
                         </a:spcAft>
                       </a:pPr>
                       <a:r>
-                        <a:rPr sz="1340" b="0">
+                        <a:rPr sz="1240" b="0">
                           <a:solidFill>
                             <a:srgbClr val="009641"/>
                           </a:solidFill>
@@ -15673,7 +15711,7 @@
                         </a:spcAft>
                       </a:pPr>
                       <a:r>
-                        <a:rPr sz="1340" b="0">
+                        <a:rPr sz="1240" b="0">
                           <a:solidFill>
                             <a:srgbClr val="000000"/>
                           </a:solidFill>
@@ -15704,7 +15742,7 @@
                         </a:spcAft>
                       </a:pPr>
                       <a:r>
-                        <a:rPr sz="1340" b="1">
+                        <a:rPr sz="1240" b="1">
                           <a:solidFill>
                             <a:srgbClr val="000000"/>
                           </a:solidFill>
@@ -15733,7 +15771,7 @@
                         </a:spcAft>
                       </a:pPr>
                       <a:r>
-                        <a:rPr sz="1340" b="1">
+                        <a:rPr sz="1240" b="1">
                           <a:solidFill>
                             <a:srgbClr val="009641"/>
                           </a:solidFill>
@@ -15762,7 +15800,7 @@
                         </a:spcAft>
                       </a:pPr>
                       <a:r>
-                        <a:rPr sz="1340" b="0">
+                        <a:rPr sz="1240" b="0">
                           <a:solidFill>
                             <a:srgbClr val="009641"/>
                           </a:solidFill>
@@ -15791,7 +15829,7 @@
                         </a:spcAft>
                       </a:pPr>
                       <a:r>
-                        <a:rPr sz="1340" b="0">
+                        <a:rPr sz="1240" b="0">
                           <a:solidFill>
                             <a:srgbClr val="FF0000"/>
                           </a:solidFill>
@@ -15820,7 +15858,7 @@
                         </a:spcAft>
                       </a:pPr>
                       <a:r>
-                        <a:rPr sz="1340" b="0">
+                        <a:rPr sz="1240" b="0">
                           <a:solidFill>
                             <a:srgbClr val="000000"/>
                           </a:solidFill>
@@ -15851,7 +15889,7 @@
                         </a:spcAft>
                       </a:pPr>
                       <a:r>
-                        <a:rPr sz="1340" b="1">
+                        <a:rPr sz="1240" b="1">
                           <a:solidFill>
                             <a:srgbClr val="009641"/>
                           </a:solidFill>
@@ -15880,7 +15918,7 @@
                         </a:spcAft>
                       </a:pPr>
                       <a:r>
-                        <a:rPr sz="1340" b="1">
+                        <a:rPr sz="1240" b="1">
                           <a:solidFill>
                             <a:srgbClr val="009641"/>
                           </a:solidFill>
@@ -15909,7 +15947,7 @@
                         </a:spcAft>
                       </a:pPr>
                       <a:r>
-                        <a:rPr sz="1340" b="0">
+                        <a:rPr sz="1240" b="0">
                           <a:solidFill>
                             <a:srgbClr val="009641"/>
                           </a:solidFill>
@@ -15938,7 +15976,7 @@
                         </a:spcAft>
                       </a:pPr>
                       <a:r>
-                        <a:rPr sz="1340" b="0">
+                        <a:rPr sz="1240" b="0">
                           <a:solidFill>
                             <a:srgbClr val="009641"/>
                           </a:solidFill>
@@ -15967,7 +16005,7 @@
                         </a:spcAft>
                       </a:pPr>
                       <a:r>
-                        <a:rPr sz="1340" b="0">
+                        <a:rPr sz="1240" b="0">
                           <a:solidFill>
                             <a:srgbClr val="000000"/>
                           </a:solidFill>
